--- a/Analitica_Predictiva_Subasta_Ganadera_Presentacion.pptx
+++ b/Analitica_Predictiva_Subasta_Ganadera_Presentacion.pptx
@@ -263,7 +263,7 @@
   </p:defaultTextStyle>
   <p:extLst>
     <p:ext uri="GoogleSlidesCustomDataVersion2">
-      <go:slidesCustomData xmlns:go="http://customooxmlschemas.google.com/" r:id="rId21" roundtripDataSignature="AMtx7miyPAuuCuIBVT+q15hvqKG5aqJnIw=="/>
+      <go:slidesCustomData xmlns:go="http://customooxmlschemas.google.com/" r:id="rId21" roundtripDataSignature="AMtx7mgWszl1ZW0yMcHRSCOCEw2h3LV8nA=="/>
     </p:ext>
   </p:extLst>
 </p:presentation>
@@ -882,7 +882,7 @@
   <p:cSld>
     <p:spTree>
       <p:nvGrpSpPr>
-        <p:cNvPr id="178" name="Shape 178"/>
+        <p:cNvPr id="180" name="Shape 180"/>
         <p:cNvGrpSpPr/>
         <p:nvPr/>
       </p:nvGrpSpPr>
@@ -896,7 +896,7 @@
       </p:grpSpPr>
       <p:sp>
         <p:nvSpPr>
-          <p:cNvPr id="179" name="Google Shape;179;p10:notes"/>
+          <p:cNvPr id="181" name="Google Shape;181;p10:notes"/>
           <p:cNvSpPr/>
           <p:nvPr>
             <p:ph idx="2" type="sldImg"/>
@@ -935,7 +935,7 @@
       </p:sp>
       <p:sp>
         <p:nvSpPr>
-          <p:cNvPr id="180" name="Google Shape;180;p10:notes"/>
+          <p:cNvPr id="182" name="Google Shape;182;p10:notes"/>
           <p:cNvSpPr txBox="1"/>
           <p:nvPr>
             <p:ph idx="1" type="body"/>
@@ -986,7 +986,7 @@
       </p:sp>
       <p:sp>
         <p:nvSpPr>
-          <p:cNvPr id="181" name="Google Shape;181;p10:notes"/>
+          <p:cNvPr id="183" name="Google Shape;183;p10:notes"/>
           <p:cNvSpPr txBox="1"/>
           <p:nvPr>
             <p:ph idx="12" type="sldNum"/>
@@ -1057,7 +1057,7 @@
   <p:cSld>
     <p:spTree>
       <p:nvGrpSpPr>
-        <p:cNvPr id="196" name="Shape 196"/>
+        <p:cNvPr id="198" name="Shape 198"/>
         <p:cNvGrpSpPr/>
         <p:nvPr/>
       </p:nvGrpSpPr>
@@ -1071,7 +1071,7 @@
       </p:grpSpPr>
       <p:sp>
         <p:nvSpPr>
-          <p:cNvPr id="197" name="Google Shape;197;p11:notes"/>
+          <p:cNvPr id="199" name="Google Shape;199;p11:notes"/>
           <p:cNvSpPr/>
           <p:nvPr>
             <p:ph idx="2" type="sldImg"/>
@@ -1110,7 +1110,7 @@
       </p:sp>
       <p:sp>
         <p:nvSpPr>
-          <p:cNvPr id="198" name="Google Shape;198;p11:notes"/>
+          <p:cNvPr id="200" name="Google Shape;200;p11:notes"/>
           <p:cNvSpPr txBox="1"/>
           <p:nvPr>
             <p:ph idx="1" type="body"/>
@@ -1161,7 +1161,7 @@
       </p:sp>
       <p:sp>
         <p:nvSpPr>
-          <p:cNvPr id="199" name="Google Shape;199;p11:notes"/>
+          <p:cNvPr id="201" name="Google Shape;201;p11:notes"/>
           <p:cNvSpPr txBox="1"/>
           <p:nvPr>
             <p:ph idx="12" type="sldNum"/>
@@ -1232,7 +1232,7 @@
   <p:cSld>
     <p:spTree>
       <p:nvGrpSpPr>
-        <p:cNvPr id="210" name="Shape 210"/>
+        <p:cNvPr id="212" name="Shape 212"/>
         <p:cNvGrpSpPr/>
         <p:nvPr/>
       </p:nvGrpSpPr>
@@ -1246,7 +1246,7 @@
       </p:grpSpPr>
       <p:sp>
         <p:nvSpPr>
-          <p:cNvPr id="211" name="Google Shape;211;p12:notes"/>
+          <p:cNvPr id="213" name="Google Shape;213;p12:notes"/>
           <p:cNvSpPr/>
           <p:nvPr>
             <p:ph idx="2" type="sldImg"/>
@@ -1285,7 +1285,7 @@
       </p:sp>
       <p:sp>
         <p:nvSpPr>
-          <p:cNvPr id="212" name="Google Shape;212;p12:notes"/>
+          <p:cNvPr id="214" name="Google Shape;214;p12:notes"/>
           <p:cNvSpPr txBox="1"/>
           <p:nvPr>
             <p:ph idx="1" type="body"/>
@@ -1336,7 +1336,7 @@
       </p:sp>
       <p:sp>
         <p:nvSpPr>
-          <p:cNvPr id="213" name="Google Shape;213;p12:notes"/>
+          <p:cNvPr id="215" name="Google Shape;215;p12:notes"/>
           <p:cNvSpPr txBox="1"/>
           <p:nvPr>
             <p:ph idx="12" type="sldNum"/>
@@ -1506,7 +1506,7 @@
   <p:cSld>
     <p:spTree>
       <p:nvGrpSpPr>
-        <p:cNvPr id="41" name="Shape 41"/>
+        <p:cNvPr id="40" name="Shape 40"/>
         <p:cNvGrpSpPr/>
         <p:nvPr/>
       </p:nvGrpSpPr>
@@ -1520,7 +1520,7 @@
       </p:grpSpPr>
       <p:sp>
         <p:nvSpPr>
-          <p:cNvPr id="42" name="Google Shape;42;p3:notes"/>
+          <p:cNvPr id="41" name="Google Shape;41;p3:notes"/>
           <p:cNvSpPr/>
           <p:nvPr>
             <p:ph idx="2" type="sldImg"/>
@@ -1559,7 +1559,7 @@
       </p:sp>
       <p:sp>
         <p:nvSpPr>
-          <p:cNvPr id="43" name="Google Shape;43;p3:notes"/>
+          <p:cNvPr id="42" name="Google Shape;42;p3:notes"/>
           <p:cNvSpPr txBox="1"/>
           <p:nvPr>
             <p:ph idx="1" type="body"/>
@@ -1610,7 +1610,7 @@
       </p:sp>
       <p:sp>
         <p:nvSpPr>
-          <p:cNvPr id="44" name="Google Shape;44;p3:notes"/>
+          <p:cNvPr id="43" name="Google Shape;43;p3:notes"/>
           <p:cNvSpPr txBox="1"/>
           <p:nvPr>
             <p:ph idx="12" type="sldNum"/>
@@ -1681,7 +1681,7 @@
   <p:cSld>
     <p:spTree>
       <p:nvGrpSpPr>
-        <p:cNvPr id="60" name="Shape 60"/>
+        <p:cNvPr id="59" name="Shape 59"/>
         <p:cNvGrpSpPr/>
         <p:nvPr/>
       </p:nvGrpSpPr>
@@ -1695,7 +1695,7 @@
       </p:grpSpPr>
       <p:sp>
         <p:nvSpPr>
-          <p:cNvPr id="61" name="Google Shape;61;p4:notes"/>
+          <p:cNvPr id="60" name="Google Shape;60;p4:notes"/>
           <p:cNvSpPr/>
           <p:nvPr>
             <p:ph idx="2" type="sldImg"/>
@@ -1734,7 +1734,7 @@
       </p:sp>
       <p:sp>
         <p:nvSpPr>
-          <p:cNvPr id="62" name="Google Shape;62;p4:notes"/>
+          <p:cNvPr id="61" name="Google Shape;61;p4:notes"/>
           <p:cNvSpPr txBox="1"/>
           <p:nvPr>
             <p:ph idx="1" type="body"/>
@@ -1785,7 +1785,7 @@
       </p:sp>
       <p:sp>
         <p:nvSpPr>
-          <p:cNvPr id="63" name="Google Shape;63;p4:notes"/>
+          <p:cNvPr id="62" name="Google Shape;62;p4:notes"/>
           <p:cNvSpPr txBox="1"/>
           <p:nvPr>
             <p:ph idx="12" type="sldNum"/>
@@ -1856,7 +1856,7 @@
   <p:cSld>
     <p:spTree>
       <p:nvGrpSpPr>
-        <p:cNvPr id="75" name="Shape 75"/>
+        <p:cNvPr id="74" name="Shape 74"/>
         <p:cNvGrpSpPr/>
         <p:nvPr/>
       </p:nvGrpSpPr>
@@ -1870,7 +1870,7 @@
       </p:grpSpPr>
       <p:sp>
         <p:nvSpPr>
-          <p:cNvPr id="76" name="Google Shape;76;p5:notes"/>
+          <p:cNvPr id="75" name="Google Shape;75;p5:notes"/>
           <p:cNvSpPr/>
           <p:nvPr>
             <p:ph idx="2" type="sldImg"/>
@@ -1909,7 +1909,7 @@
       </p:sp>
       <p:sp>
         <p:nvSpPr>
-          <p:cNvPr id="77" name="Google Shape;77;p5:notes"/>
+          <p:cNvPr id="76" name="Google Shape;76;p5:notes"/>
           <p:cNvSpPr txBox="1"/>
           <p:nvPr>
             <p:ph idx="1" type="body"/>
@@ -1960,7 +1960,7 @@
       </p:sp>
       <p:sp>
         <p:nvSpPr>
-          <p:cNvPr id="78" name="Google Shape;78;p5:notes"/>
+          <p:cNvPr id="77" name="Google Shape;77;p5:notes"/>
           <p:cNvSpPr txBox="1"/>
           <p:nvPr>
             <p:ph idx="12" type="sldNum"/>
@@ -2031,7 +2031,7 @@
   <p:cSld>
     <p:spTree>
       <p:nvGrpSpPr>
-        <p:cNvPr id="96" name="Shape 96"/>
+        <p:cNvPr id="95" name="Shape 95"/>
         <p:cNvGrpSpPr/>
         <p:nvPr/>
       </p:nvGrpSpPr>
@@ -2045,7 +2045,7 @@
       </p:grpSpPr>
       <p:sp>
         <p:nvSpPr>
-          <p:cNvPr id="97" name="Google Shape;97;p6:notes"/>
+          <p:cNvPr id="96" name="Google Shape;96;p6:notes"/>
           <p:cNvSpPr/>
           <p:nvPr>
             <p:ph idx="2" type="sldImg"/>
@@ -2084,7 +2084,7 @@
       </p:sp>
       <p:sp>
         <p:nvSpPr>
-          <p:cNvPr id="98" name="Google Shape;98;p6:notes"/>
+          <p:cNvPr id="97" name="Google Shape;97;p6:notes"/>
           <p:cNvSpPr txBox="1"/>
           <p:nvPr>
             <p:ph idx="1" type="body"/>
@@ -2135,7 +2135,7 @@
       </p:sp>
       <p:sp>
         <p:nvSpPr>
-          <p:cNvPr id="99" name="Google Shape;99;p6:notes"/>
+          <p:cNvPr id="98" name="Google Shape;98;p6:notes"/>
           <p:cNvSpPr txBox="1"/>
           <p:nvPr>
             <p:ph idx="12" type="sldNum"/>
@@ -2206,7 +2206,7 @@
   <p:cSld>
     <p:spTree>
       <p:nvGrpSpPr>
-        <p:cNvPr id="111" name="Shape 111"/>
+        <p:cNvPr id="113" name="Shape 113"/>
         <p:cNvGrpSpPr/>
         <p:nvPr/>
       </p:nvGrpSpPr>
@@ -2220,7 +2220,7 @@
       </p:grpSpPr>
       <p:sp>
         <p:nvSpPr>
-          <p:cNvPr id="112" name="Google Shape;112;p7:notes"/>
+          <p:cNvPr id="114" name="Google Shape;114;p7:notes"/>
           <p:cNvSpPr/>
           <p:nvPr>
             <p:ph idx="2" type="sldImg"/>
@@ -2259,7 +2259,7 @@
       </p:sp>
       <p:sp>
         <p:nvSpPr>
-          <p:cNvPr id="113" name="Google Shape;113;p7:notes"/>
+          <p:cNvPr id="115" name="Google Shape;115;p7:notes"/>
           <p:cNvSpPr txBox="1"/>
           <p:nvPr>
             <p:ph idx="1" type="body"/>
@@ -2310,7 +2310,7 @@
       </p:sp>
       <p:sp>
         <p:nvSpPr>
-          <p:cNvPr id="114" name="Google Shape;114;p7:notes"/>
+          <p:cNvPr id="116" name="Google Shape;116;p7:notes"/>
           <p:cNvSpPr txBox="1"/>
           <p:nvPr>
             <p:ph idx="12" type="sldNum"/>
@@ -2381,7 +2381,7 @@
   <p:cSld>
     <p:spTree>
       <p:nvGrpSpPr>
-        <p:cNvPr id="127" name="Shape 127"/>
+        <p:cNvPr id="129" name="Shape 129"/>
         <p:cNvGrpSpPr/>
         <p:nvPr/>
       </p:nvGrpSpPr>
@@ -2395,7 +2395,7 @@
       </p:grpSpPr>
       <p:sp>
         <p:nvSpPr>
-          <p:cNvPr id="128" name="Google Shape;128;p8:notes"/>
+          <p:cNvPr id="130" name="Google Shape;130;p8:notes"/>
           <p:cNvSpPr/>
           <p:nvPr>
             <p:ph idx="2" type="sldImg"/>
@@ -2434,7 +2434,7 @@
       </p:sp>
       <p:sp>
         <p:nvSpPr>
-          <p:cNvPr id="129" name="Google Shape;129;p8:notes"/>
+          <p:cNvPr id="131" name="Google Shape;131;p8:notes"/>
           <p:cNvSpPr txBox="1"/>
           <p:nvPr>
             <p:ph idx="1" type="body"/>
@@ -2485,7 +2485,7 @@
       </p:sp>
       <p:sp>
         <p:nvSpPr>
-          <p:cNvPr id="130" name="Google Shape;130;p8:notes"/>
+          <p:cNvPr id="132" name="Google Shape;132;p8:notes"/>
           <p:cNvSpPr txBox="1"/>
           <p:nvPr>
             <p:ph idx="12" type="sldNum"/>
@@ -2556,7 +2556,7 @@
   <p:cSld>
     <p:spTree>
       <p:nvGrpSpPr>
-        <p:cNvPr id="162" name="Shape 162"/>
+        <p:cNvPr id="164" name="Shape 164"/>
         <p:cNvGrpSpPr/>
         <p:nvPr/>
       </p:nvGrpSpPr>
@@ -2570,7 +2570,7 @@
       </p:grpSpPr>
       <p:sp>
         <p:nvSpPr>
-          <p:cNvPr id="163" name="Google Shape;163;p9:notes"/>
+          <p:cNvPr id="165" name="Google Shape;165;p9:notes"/>
           <p:cNvSpPr/>
           <p:nvPr>
             <p:ph idx="2" type="sldImg"/>
@@ -2609,7 +2609,7 @@
       </p:sp>
       <p:sp>
         <p:nvSpPr>
-          <p:cNvPr id="164" name="Google Shape;164;p9:notes"/>
+          <p:cNvPr id="166" name="Google Shape;166;p9:notes"/>
           <p:cNvSpPr txBox="1"/>
           <p:nvPr>
             <p:ph idx="1" type="body"/>
@@ -2660,7 +2660,7 @@
       </p:sp>
       <p:sp>
         <p:nvSpPr>
-          <p:cNvPr id="165" name="Google Shape;165;p9:notes"/>
+          <p:cNvPr id="167" name="Google Shape;167;p9:notes"/>
           <p:cNvSpPr txBox="1"/>
           <p:nvPr>
             <p:ph idx="12" type="sldNum"/>
@@ -4367,7 +4367,7 @@
     </p:bg>
     <p:spTree>
       <p:nvGrpSpPr>
-        <p:cNvPr id="182" name="Shape 182"/>
+        <p:cNvPr id="184" name="Shape 184"/>
         <p:cNvGrpSpPr/>
         <p:nvPr/>
       </p:nvGrpSpPr>
@@ -4381,7 +4381,7 @@
       </p:grpSpPr>
       <p:sp>
         <p:nvSpPr>
-          <p:cNvPr id="183" name="Google Shape;183;p10"/>
+          <p:cNvPr id="185" name="Google Shape;185;p10"/>
           <p:cNvSpPr/>
           <p:nvPr/>
         </p:nvSpPr>
@@ -4430,7 +4430,7 @@
       </p:sp>
       <p:sp>
         <p:nvSpPr>
-          <p:cNvPr id="184" name="Google Shape;184;p10"/>
+          <p:cNvPr id="186" name="Google Shape;186;p10"/>
           <p:cNvSpPr/>
           <p:nvPr/>
         </p:nvSpPr>
@@ -4493,7 +4493,7 @@
       </p:sp>
       <p:sp>
         <p:nvSpPr>
-          <p:cNvPr id="185" name="Google Shape;185;p10"/>
+          <p:cNvPr id="187" name="Google Shape;187;p10"/>
           <p:cNvSpPr/>
           <p:nvPr/>
         </p:nvSpPr>
@@ -4549,7 +4549,7 @@
       </p:sp>
       <p:sp>
         <p:nvSpPr>
-          <p:cNvPr id="186" name="Google Shape;186;p10"/>
+          <p:cNvPr id="188" name="Google Shape;188;p10"/>
           <p:cNvSpPr/>
           <p:nvPr/>
         </p:nvSpPr>
@@ -4598,7 +4598,7 @@
       </p:sp>
       <p:sp>
         <p:nvSpPr>
-          <p:cNvPr id="187" name="Google Shape;187;p10"/>
+          <p:cNvPr id="189" name="Google Shape;189;p10"/>
           <p:cNvSpPr/>
           <p:nvPr/>
         </p:nvSpPr>
@@ -4647,7 +4647,7 @@
       </p:sp>
       <p:sp>
         <p:nvSpPr>
-          <p:cNvPr id="188" name="Google Shape;188;p10"/>
+          <p:cNvPr id="190" name="Google Shape;190;p10"/>
           <p:cNvSpPr/>
           <p:nvPr/>
         </p:nvSpPr>
@@ -4710,7 +4710,7 @@
       </p:sp>
       <p:sp>
         <p:nvSpPr>
-          <p:cNvPr id="189" name="Google Shape;189;p10"/>
+          <p:cNvPr id="191" name="Google Shape;191;p10"/>
           <p:cNvSpPr/>
           <p:nvPr/>
         </p:nvSpPr>
@@ -4760,7 +4760,7 @@
       </p:sp>
       <p:sp>
         <p:nvSpPr>
-          <p:cNvPr id="190" name="Google Shape;190;p10"/>
+          <p:cNvPr id="192" name="Google Shape;192;p10"/>
           <p:cNvSpPr/>
           <p:nvPr/>
         </p:nvSpPr>
@@ -4816,7 +4816,7 @@
       </p:sp>
       <p:sp>
         <p:nvSpPr>
-          <p:cNvPr id="191" name="Google Shape;191;p10"/>
+          <p:cNvPr id="193" name="Google Shape;193;p10"/>
           <p:cNvSpPr/>
           <p:nvPr/>
         </p:nvSpPr>
@@ -4865,7 +4865,7 @@
       </p:sp>
       <p:sp>
         <p:nvSpPr>
-          <p:cNvPr id="192" name="Google Shape;192;p10"/>
+          <p:cNvPr id="194" name="Google Shape;194;p10"/>
           <p:cNvSpPr/>
           <p:nvPr/>
         </p:nvSpPr>
@@ -4914,7 +4914,7 @@
       </p:sp>
       <p:sp>
         <p:nvSpPr>
-          <p:cNvPr id="193" name="Google Shape;193;p10"/>
+          <p:cNvPr id="195" name="Google Shape;195;p10"/>
           <p:cNvSpPr/>
           <p:nvPr/>
         </p:nvSpPr>
@@ -4977,7 +4977,7 @@
       </p:sp>
       <p:sp>
         <p:nvSpPr>
-          <p:cNvPr id="194" name="Google Shape;194;p10"/>
+          <p:cNvPr id="196" name="Google Shape;196;p10"/>
           <p:cNvSpPr/>
           <p:nvPr/>
         </p:nvSpPr>
@@ -5027,7 +5027,7 @@
       </p:sp>
       <p:sp>
         <p:nvSpPr>
-          <p:cNvPr id="195" name="Google Shape;195;p10"/>
+          <p:cNvPr id="197" name="Google Shape;197;p10"/>
           <p:cNvSpPr/>
           <p:nvPr/>
         </p:nvSpPr>
@@ -5108,7 +5108,7 @@
     </p:bg>
     <p:spTree>
       <p:nvGrpSpPr>
-        <p:cNvPr id="200" name="Shape 200"/>
+        <p:cNvPr id="202" name="Shape 202"/>
         <p:cNvGrpSpPr/>
         <p:nvPr/>
       </p:nvGrpSpPr>
@@ -5122,7 +5122,7 @@
       </p:grpSpPr>
       <p:sp>
         <p:nvSpPr>
-          <p:cNvPr id="201" name="Google Shape;201;p11"/>
+          <p:cNvPr id="203" name="Google Shape;203;p11"/>
           <p:cNvSpPr/>
           <p:nvPr/>
         </p:nvSpPr>
@@ -5171,7 +5171,7 @@
       </p:sp>
       <p:sp>
         <p:nvSpPr>
-          <p:cNvPr id="202" name="Google Shape;202;p11"/>
+          <p:cNvPr id="204" name="Google Shape;204;p11"/>
           <p:cNvSpPr/>
           <p:nvPr/>
         </p:nvSpPr>
@@ -5234,7 +5234,7 @@
       </p:sp>
       <p:sp>
         <p:nvSpPr>
-          <p:cNvPr id="203" name="Google Shape;203;p11"/>
+          <p:cNvPr id="205" name="Google Shape;205;p11"/>
           <p:cNvSpPr/>
           <p:nvPr/>
         </p:nvSpPr>
@@ -5290,7 +5290,7 @@
       </p:sp>
       <p:sp>
         <p:nvSpPr>
-          <p:cNvPr id="204" name="Google Shape;204;p11"/>
+          <p:cNvPr id="206" name="Google Shape;206;p11"/>
           <p:cNvSpPr/>
           <p:nvPr/>
         </p:nvSpPr>
@@ -5339,7 +5339,7 @@
       </p:sp>
       <p:sp>
         <p:nvSpPr>
-          <p:cNvPr id="205" name="Google Shape;205;p11"/>
+          <p:cNvPr id="207" name="Google Shape;207;p11"/>
           <p:cNvSpPr/>
           <p:nvPr/>
         </p:nvSpPr>
@@ -5412,7 +5412,7 @@
       </p:sp>
       <p:sp>
         <p:nvSpPr>
-          <p:cNvPr id="206" name="Google Shape;206;p11"/>
+          <p:cNvPr id="208" name="Google Shape;208;p11"/>
           <p:cNvSpPr/>
           <p:nvPr/>
         </p:nvSpPr>
@@ -5468,7 +5468,7 @@
       </p:sp>
       <p:sp>
         <p:nvSpPr>
-          <p:cNvPr id="207" name="Google Shape;207;p11"/>
+          <p:cNvPr id="209" name="Google Shape;209;p11"/>
           <p:cNvSpPr/>
           <p:nvPr/>
         </p:nvSpPr>
@@ -5517,7 +5517,7 @@
       </p:sp>
       <p:sp>
         <p:nvSpPr>
-          <p:cNvPr id="208" name="Google Shape;208;p11"/>
+          <p:cNvPr id="210" name="Google Shape;210;p11"/>
           <p:cNvSpPr/>
           <p:nvPr/>
         </p:nvSpPr>
@@ -5595,7 +5595,7 @@
       </p:sp>
       <p:sp>
         <p:nvSpPr>
-          <p:cNvPr id="209" name="Google Shape;209;p11"/>
+          <p:cNvPr id="211" name="Google Shape;211;p11"/>
           <p:cNvSpPr/>
           <p:nvPr/>
         </p:nvSpPr>
@@ -5676,7 +5676,7 @@
     </p:bg>
     <p:spTree>
       <p:nvGrpSpPr>
-        <p:cNvPr id="214" name="Shape 214"/>
+        <p:cNvPr id="216" name="Shape 216"/>
         <p:cNvGrpSpPr/>
         <p:nvPr/>
       </p:nvGrpSpPr>
@@ -5690,7 +5690,7 @@
       </p:grpSpPr>
       <p:sp>
         <p:nvSpPr>
-          <p:cNvPr id="215" name="Google Shape;215;p12"/>
+          <p:cNvPr id="217" name="Google Shape;217;p12"/>
           <p:cNvSpPr/>
           <p:nvPr/>
         </p:nvSpPr>
@@ -5739,7 +5739,7 @@
       </p:sp>
       <p:sp>
         <p:nvSpPr>
-          <p:cNvPr id="216" name="Google Shape;216;p12"/>
+          <p:cNvPr id="218" name="Google Shape;218;p12"/>
           <p:cNvSpPr/>
           <p:nvPr/>
         </p:nvSpPr>
@@ -5788,7 +5788,7 @@
       </p:sp>
       <p:sp>
         <p:nvSpPr>
-          <p:cNvPr id="217" name="Google Shape;217;p12"/>
+          <p:cNvPr id="219" name="Google Shape;219;p12"/>
           <p:cNvSpPr/>
           <p:nvPr/>
         </p:nvSpPr>
@@ -5851,7 +5851,7 @@
       </p:sp>
       <p:sp>
         <p:nvSpPr>
-          <p:cNvPr id="218" name="Google Shape;218;p12"/>
+          <p:cNvPr id="220" name="Google Shape;220;p12"/>
           <p:cNvSpPr/>
           <p:nvPr/>
         </p:nvSpPr>
@@ -5914,7 +5914,7 @@
       </p:sp>
       <p:sp>
         <p:nvSpPr>
-          <p:cNvPr id="219" name="Google Shape;219;p12"/>
+          <p:cNvPr id="221" name="Google Shape;221;p12"/>
           <p:cNvSpPr/>
           <p:nvPr/>
         </p:nvSpPr>
@@ -5963,7 +5963,7 @@
       </p:sp>
       <p:sp>
         <p:nvSpPr>
-          <p:cNvPr id="220" name="Google Shape;220;p12"/>
+          <p:cNvPr id="222" name="Google Shape;222;p12"/>
           <p:cNvSpPr/>
           <p:nvPr/>
         </p:nvSpPr>
@@ -6594,7 +6594,7 @@
                 <a:cs typeface="Calibri"/>
                 <a:sym typeface="Calibri"/>
               </a:rPr>
-              <a:t>Retención de proveedores al tener bases menores a su expectativa, se le da explicación con datos no opiniones ni percepciones.</a:t>
+              <a:t>Retención de proveedores al tener bases menores a su expectativa, se le da explicación con datos, no opiniones ni percepciones.</a:t>
             </a:r>
             <a:endParaRPr sz="2000">
               <a:latin typeface="Calibri"/>
@@ -6788,7 +6788,7 @@
         </p:nvSpPr>
         <p:spPr>
           <a:xfrm>
-            <a:off x="3257413" y="652030"/>
+            <a:off x="3559538" y="652030"/>
             <a:ext cx="5423400" cy="822900"/>
           </a:xfrm>
           <a:prstGeom prst="rect">
@@ -6829,7 +6829,7 @@
                 <a:cs typeface="Calibri"/>
                 <a:sym typeface="Calibri"/>
               </a:rPr>
-              <a:t>¿Por Qué importa?</a:t>
+              <a:t>¿Por Qué es importante?</a:t>
             </a:r>
             <a:endParaRPr sz="2000">
               <a:solidFill>
@@ -6843,34 +6843,6 @@
           </a:p>
         </p:txBody>
       </p:sp>
-      <p:pic>
-        <p:nvPicPr>
-          <p:cNvPr id="40" name="Google Shape;40;p2" title="descarga.png"/>
-          <p:cNvPicPr preferRelativeResize="0"/>
-          <p:nvPr/>
-        </p:nvPicPr>
-        <p:blipFill>
-          <a:blip r:embed="rId3">
-            <a:alphaModFix/>
-          </a:blip>
-          <a:stretch>
-            <a:fillRect/>
-          </a:stretch>
-        </p:blipFill>
-        <p:spPr>
-          <a:xfrm>
-            <a:off x="7629675" y="5026300"/>
-            <a:ext cx="1659725" cy="405800"/>
-          </a:xfrm>
-          <a:prstGeom prst="rect">
-            <a:avLst/>
-          </a:prstGeom>
-          <a:noFill/>
-          <a:ln>
-            <a:noFill/>
-          </a:ln>
-        </p:spPr>
-      </p:pic>
     </p:spTree>
   </p:cSld>
   <p:clrMapOvr>
@@ -6891,7 +6863,7 @@
     </p:bg>
     <p:spTree>
       <p:nvGrpSpPr>
-        <p:cNvPr id="45" name="Shape 45"/>
+        <p:cNvPr id="44" name="Shape 44"/>
         <p:cNvGrpSpPr/>
         <p:nvPr/>
       </p:nvGrpSpPr>
@@ -6905,7 +6877,7 @@
       </p:grpSpPr>
       <p:sp>
         <p:nvSpPr>
-          <p:cNvPr id="46" name="Google Shape;46;p3"/>
+          <p:cNvPr id="45" name="Google Shape;45;p3"/>
           <p:cNvSpPr/>
           <p:nvPr/>
         </p:nvSpPr>
@@ -6954,7 +6926,7 @@
       </p:sp>
       <p:sp>
         <p:nvSpPr>
-          <p:cNvPr id="47" name="Google Shape;47;p3"/>
+          <p:cNvPr id="46" name="Google Shape;46;p3"/>
           <p:cNvSpPr/>
           <p:nvPr/>
         </p:nvSpPr>
@@ -7017,7 +6989,7 @@
       </p:sp>
       <p:grpSp>
         <p:nvGrpSpPr>
-          <p:cNvPr id="48" name="Google Shape;48;p3"/>
+          <p:cNvPr id="47" name="Google Shape;47;p3"/>
           <p:cNvGrpSpPr/>
           <p:nvPr/>
         </p:nvGrpSpPr>
@@ -7031,7 +7003,7 @@
         </p:grpSpPr>
         <p:sp>
           <p:nvSpPr>
-            <p:cNvPr id="49" name="Google Shape;49;p3"/>
+            <p:cNvPr id="48" name="Google Shape;48;p3"/>
             <p:cNvSpPr/>
             <p:nvPr/>
           </p:nvSpPr>
@@ -7080,7 +7052,7 @@
         </p:sp>
         <p:sp>
           <p:nvSpPr>
-            <p:cNvPr id="50" name="Google Shape;50;p3"/>
+            <p:cNvPr id="49" name="Google Shape;49;p3"/>
             <p:cNvSpPr/>
             <p:nvPr/>
           </p:nvSpPr>
@@ -7131,7 +7103,7 @@
       </p:grpSp>
       <p:sp>
         <p:nvSpPr>
-          <p:cNvPr id="51" name="Google Shape;51;p3"/>
+          <p:cNvPr id="50" name="Google Shape;50;p3"/>
           <p:cNvSpPr/>
           <p:nvPr/>
         </p:nvSpPr>
@@ -7187,7 +7159,7 @@
       </p:sp>
       <p:sp>
         <p:nvSpPr>
-          <p:cNvPr id="52" name="Google Shape;52;p3"/>
+          <p:cNvPr id="51" name="Google Shape;51;p3"/>
           <p:cNvSpPr/>
           <p:nvPr/>
         </p:nvSpPr>
@@ -7236,7 +7208,7 @@
       </p:sp>
       <p:sp>
         <p:nvSpPr>
-          <p:cNvPr id="53" name="Google Shape;53;p3"/>
+          <p:cNvPr id="52" name="Google Shape;52;p3"/>
           <p:cNvSpPr/>
           <p:nvPr/>
         </p:nvSpPr>
@@ -7292,7 +7264,7 @@
       </p:sp>
       <p:sp>
         <p:nvSpPr>
-          <p:cNvPr id="54" name="Google Shape;54;p3"/>
+          <p:cNvPr id="53" name="Google Shape;53;p3"/>
           <p:cNvSpPr/>
           <p:nvPr/>
         </p:nvSpPr>
@@ -7341,7 +7313,7 @@
       </p:sp>
       <p:sp>
         <p:nvSpPr>
-          <p:cNvPr id="55" name="Google Shape;55;p3"/>
+          <p:cNvPr id="54" name="Google Shape;54;p3"/>
           <p:cNvSpPr/>
           <p:nvPr/>
         </p:nvSpPr>
@@ -7404,7 +7376,7 @@
       </p:sp>
       <p:pic>
         <p:nvPicPr>
-          <p:cNvPr id="56" name="Google Shape;56;p3"/>
+          <p:cNvPr id="55" name="Google Shape;55;p3"/>
           <p:cNvPicPr preferRelativeResize="0"/>
           <p:nvPr/>
         </p:nvPicPr>
@@ -7431,7 +7403,7 @@
       </p:pic>
       <p:pic>
         <p:nvPicPr>
-          <p:cNvPr id="57" name="Google Shape;57;p3"/>
+          <p:cNvPr id="56" name="Google Shape;56;p3"/>
           <p:cNvPicPr preferRelativeResize="0"/>
           <p:nvPr/>
         </p:nvPicPr>
@@ -7458,7 +7430,7 @@
       </p:pic>
       <p:sp>
         <p:nvSpPr>
-          <p:cNvPr id="58" name="Google Shape;58;p3"/>
+          <p:cNvPr id="57" name="Google Shape;57;p3"/>
           <p:cNvSpPr txBox="1"/>
           <p:nvPr/>
         </p:nvSpPr>
@@ -7521,7 +7493,7 @@
       </p:sp>
       <p:sp>
         <p:nvSpPr>
-          <p:cNvPr id="59" name="Google Shape;59;p3"/>
+          <p:cNvPr id="58" name="Google Shape;58;p3"/>
           <p:cNvSpPr/>
           <p:nvPr/>
         </p:nvSpPr>
@@ -7591,7 +7563,7 @@
     </p:bg>
     <p:spTree>
       <p:nvGrpSpPr>
-        <p:cNvPr id="64" name="Shape 64"/>
+        <p:cNvPr id="63" name="Shape 63"/>
         <p:cNvGrpSpPr/>
         <p:nvPr/>
       </p:nvGrpSpPr>
@@ -7605,7 +7577,7 @@
       </p:grpSpPr>
       <p:sp>
         <p:nvSpPr>
-          <p:cNvPr id="65" name="Google Shape;65;p4"/>
+          <p:cNvPr id="64" name="Google Shape;64;p4"/>
           <p:cNvSpPr/>
           <p:nvPr/>
         </p:nvSpPr>
@@ -7654,7 +7626,7 @@
       </p:sp>
       <p:sp>
         <p:nvSpPr>
-          <p:cNvPr id="66" name="Google Shape;66;p4"/>
+          <p:cNvPr id="65" name="Google Shape;65;p4"/>
           <p:cNvSpPr/>
           <p:nvPr/>
         </p:nvSpPr>
@@ -7717,7 +7689,7 @@
       </p:sp>
       <p:sp>
         <p:nvSpPr>
-          <p:cNvPr id="67" name="Google Shape;67;p4"/>
+          <p:cNvPr id="66" name="Google Shape;66;p4"/>
           <p:cNvSpPr/>
           <p:nvPr/>
         </p:nvSpPr>
@@ -7771,7 +7743,7 @@
       </p:sp>
       <p:sp>
         <p:nvSpPr>
-          <p:cNvPr id="68" name="Google Shape;68;p4"/>
+          <p:cNvPr id="67" name="Google Shape;67;p4"/>
           <p:cNvSpPr/>
           <p:nvPr/>
         </p:nvSpPr>
@@ -7820,7 +7792,7 @@
       </p:sp>
       <p:sp>
         <p:nvSpPr>
-          <p:cNvPr id="69" name="Google Shape;69;p4"/>
+          <p:cNvPr id="68" name="Google Shape;68;p4"/>
           <p:cNvSpPr/>
           <p:nvPr/>
         </p:nvSpPr>
@@ -7894,7 +7866,7 @@
       </p:sp>
       <p:sp>
         <p:nvSpPr>
-          <p:cNvPr id="70" name="Google Shape;70;p4"/>
+          <p:cNvPr id="69" name="Google Shape;69;p4"/>
           <p:cNvSpPr/>
           <p:nvPr/>
         </p:nvSpPr>
@@ -7943,7 +7915,7 @@
       </p:sp>
       <p:sp>
         <p:nvSpPr>
-          <p:cNvPr id="71" name="Google Shape;71;p4"/>
+          <p:cNvPr id="70" name="Google Shape;70;p4"/>
           <p:cNvSpPr/>
           <p:nvPr/>
         </p:nvSpPr>
@@ -7993,7 +7965,7 @@
       </p:sp>
       <p:pic>
         <p:nvPicPr>
-          <p:cNvPr descr="/home/claude/content_unpacked/ppt/media/image1.png" id="72" name="Google Shape;72;p4"/>
+          <p:cNvPr descr="/home/claude/content_unpacked/ppt/media/image1.png" id="71" name="Google Shape;71;p4"/>
           <p:cNvPicPr preferRelativeResize="0"/>
           <p:nvPr/>
         </p:nvPicPr>
@@ -8020,7 +7992,7 @@
       </p:pic>
       <p:pic>
         <p:nvPicPr>
-          <p:cNvPr descr="/home/claude/content_unpacked/ppt/media/image4.png" id="73" name="Google Shape;73;p4"/>
+          <p:cNvPr descr="/home/claude/content_unpacked/ppt/media/image4.png" id="72" name="Google Shape;72;p4"/>
           <p:cNvPicPr preferRelativeResize="0"/>
           <p:nvPr/>
         </p:nvPicPr>
@@ -8047,7 +8019,7 @@
       </p:pic>
       <p:sp>
         <p:nvSpPr>
-          <p:cNvPr id="74" name="Google Shape;74;p4"/>
+          <p:cNvPr id="73" name="Google Shape;73;p4"/>
           <p:cNvSpPr/>
           <p:nvPr/>
         </p:nvSpPr>
@@ -8128,7 +8100,7 @@
     </p:bg>
     <p:spTree>
       <p:nvGrpSpPr>
-        <p:cNvPr id="79" name="Shape 79"/>
+        <p:cNvPr id="78" name="Shape 78"/>
         <p:cNvGrpSpPr/>
         <p:nvPr/>
       </p:nvGrpSpPr>
@@ -8142,7 +8114,7 @@
       </p:grpSpPr>
       <p:sp>
         <p:nvSpPr>
-          <p:cNvPr id="80" name="Google Shape;80;p5"/>
+          <p:cNvPr id="79" name="Google Shape;79;p5"/>
           <p:cNvSpPr/>
           <p:nvPr/>
         </p:nvSpPr>
@@ -8191,7 +8163,7 @@
       </p:sp>
       <p:sp>
         <p:nvSpPr>
-          <p:cNvPr id="81" name="Google Shape;81;p5"/>
+          <p:cNvPr id="80" name="Google Shape;80;p5"/>
           <p:cNvSpPr/>
           <p:nvPr/>
         </p:nvSpPr>
@@ -8254,7 +8226,7 @@
       </p:sp>
       <p:sp>
         <p:nvSpPr>
-          <p:cNvPr id="82" name="Google Shape;82;p5"/>
+          <p:cNvPr id="81" name="Google Shape;81;p5"/>
           <p:cNvSpPr/>
           <p:nvPr/>
         </p:nvSpPr>
@@ -8317,7 +8289,7 @@
       </p:sp>
       <p:sp>
         <p:nvSpPr>
-          <p:cNvPr id="83" name="Google Shape;83;p5"/>
+          <p:cNvPr id="82" name="Google Shape;82;p5"/>
           <p:cNvSpPr/>
           <p:nvPr/>
         </p:nvSpPr>
@@ -8373,7 +8345,7 @@
       </p:sp>
       <p:sp>
         <p:nvSpPr>
-          <p:cNvPr id="84" name="Google Shape;84;p5"/>
+          <p:cNvPr id="83" name="Google Shape;83;p5"/>
           <p:cNvSpPr/>
           <p:nvPr/>
         </p:nvSpPr>
@@ -8422,7 +8394,7 @@
       </p:sp>
       <p:sp>
         <p:nvSpPr>
-          <p:cNvPr id="85" name="Google Shape;85;p5"/>
+          <p:cNvPr id="84" name="Google Shape;84;p5"/>
           <p:cNvSpPr/>
           <p:nvPr/>
         </p:nvSpPr>
@@ -8485,7 +8457,7 @@
       </p:sp>
       <p:sp>
         <p:nvSpPr>
-          <p:cNvPr id="86" name="Google Shape;86;p5"/>
+          <p:cNvPr id="85" name="Google Shape;85;p5"/>
           <p:cNvSpPr/>
           <p:nvPr/>
         </p:nvSpPr>
@@ -8549,7 +8521,7 @@
       </p:sp>
       <p:sp>
         <p:nvSpPr>
-          <p:cNvPr id="87" name="Google Shape;87;p5"/>
+          <p:cNvPr id="86" name="Google Shape;86;p5"/>
           <p:cNvSpPr/>
           <p:nvPr/>
         </p:nvSpPr>
@@ -8598,7 +8570,7 @@
       </p:sp>
       <p:sp>
         <p:nvSpPr>
-          <p:cNvPr id="88" name="Google Shape;88;p5"/>
+          <p:cNvPr id="87" name="Google Shape;87;p5"/>
           <p:cNvSpPr/>
           <p:nvPr/>
         </p:nvSpPr>
@@ -8661,7 +8633,7 @@
       </p:sp>
       <p:sp>
         <p:nvSpPr>
-          <p:cNvPr id="89" name="Google Shape;89;p5"/>
+          <p:cNvPr id="88" name="Google Shape;88;p5"/>
           <p:cNvSpPr/>
           <p:nvPr/>
         </p:nvSpPr>
@@ -8724,7 +8696,7 @@
       </p:sp>
       <p:sp>
         <p:nvSpPr>
-          <p:cNvPr id="90" name="Google Shape;90;p5"/>
+          <p:cNvPr id="89" name="Google Shape;89;p5"/>
           <p:cNvSpPr/>
           <p:nvPr/>
         </p:nvSpPr>
@@ -8787,7 +8759,7 @@
       </p:sp>
       <p:pic>
         <p:nvPicPr>
-          <p:cNvPr id="91" name="Google Shape;91;p5"/>
+          <p:cNvPr id="90" name="Google Shape;90;p5"/>
           <p:cNvPicPr preferRelativeResize="0"/>
           <p:nvPr/>
         </p:nvPicPr>
@@ -8814,7 +8786,7 @@
       </p:pic>
       <p:pic>
         <p:nvPicPr>
-          <p:cNvPr id="92" name="Google Shape;92;p5"/>
+          <p:cNvPr id="91" name="Google Shape;91;p5"/>
           <p:cNvPicPr preferRelativeResize="0"/>
           <p:nvPr/>
         </p:nvPicPr>
@@ -8841,7 +8813,7 @@
       </p:pic>
       <p:sp>
         <p:nvSpPr>
-          <p:cNvPr id="93" name="Google Shape;93;p5"/>
+          <p:cNvPr id="92" name="Google Shape;92;p5"/>
           <p:cNvSpPr/>
           <p:nvPr/>
         </p:nvSpPr>
@@ -8905,7 +8877,7 @@
       </p:sp>
       <p:sp>
         <p:nvSpPr>
-          <p:cNvPr id="94" name="Google Shape;94;p5"/>
+          <p:cNvPr id="93" name="Google Shape;93;p5"/>
           <p:cNvSpPr/>
           <p:nvPr/>
         </p:nvSpPr>
@@ -8967,7 +8939,7 @@
       </p:sp>
       <p:pic>
         <p:nvPicPr>
-          <p:cNvPr id="95" name="Google Shape;95;p5"/>
+          <p:cNvPr id="94" name="Google Shape;94;p5"/>
           <p:cNvPicPr preferRelativeResize="0"/>
           <p:nvPr/>
         </p:nvPicPr>
@@ -9013,7 +8985,7 @@
     </p:bg>
     <p:spTree>
       <p:nvGrpSpPr>
-        <p:cNvPr id="100" name="Shape 100"/>
+        <p:cNvPr id="99" name="Shape 99"/>
         <p:cNvGrpSpPr/>
         <p:nvPr/>
       </p:nvGrpSpPr>
@@ -9027,7 +8999,7 @@
       </p:grpSpPr>
       <p:sp>
         <p:nvSpPr>
-          <p:cNvPr id="101" name="Google Shape;101;p6"/>
+          <p:cNvPr id="100" name="Google Shape;100;p6"/>
           <p:cNvSpPr/>
           <p:nvPr/>
         </p:nvSpPr>
@@ -9076,13 +9048,13 @@
       </p:sp>
       <p:sp>
         <p:nvSpPr>
-          <p:cNvPr id="102" name="Google Shape;102;p6"/>
+          <p:cNvPr id="101" name="Google Shape;101;p6"/>
           <p:cNvSpPr/>
           <p:nvPr/>
         </p:nvSpPr>
         <p:spPr>
           <a:xfrm>
-            <a:off x="278766" y="182880"/>
+            <a:off x="278766" y="-31433"/>
             <a:ext cx="5029200" cy="457200"/>
           </a:xfrm>
           <a:prstGeom prst="rect">
@@ -9139,13 +9111,13 @@
       </p:sp>
       <p:sp>
         <p:nvSpPr>
-          <p:cNvPr id="103" name="Google Shape;103;p6"/>
+          <p:cNvPr id="102" name="Google Shape;102;p6"/>
           <p:cNvSpPr/>
           <p:nvPr/>
         </p:nvSpPr>
         <p:spPr>
           <a:xfrm>
-            <a:off x="4410963" y="171994"/>
+            <a:off x="4410963" y="-42319"/>
             <a:ext cx="5029200" cy="457200"/>
           </a:xfrm>
           <a:prstGeom prst="rect">
@@ -9202,14 +9174,14 @@
       </p:sp>
       <p:sp>
         <p:nvSpPr>
-          <p:cNvPr id="104" name="Google Shape;104;p6"/>
+          <p:cNvPr id="103" name="Google Shape;103;p6"/>
           <p:cNvSpPr/>
           <p:nvPr/>
         </p:nvSpPr>
         <p:spPr>
           <a:xfrm>
-            <a:off x="356110" y="629190"/>
-            <a:ext cx="63900" cy="1005900"/>
+            <a:off x="274324" y="319634"/>
+            <a:ext cx="26700" cy="696600"/>
           </a:xfrm>
           <a:prstGeom prst="rect">
             <a:avLst/>
@@ -9251,28 +9223,28 @@
       </p:sp>
       <p:grpSp>
         <p:nvGrpSpPr>
-          <p:cNvPr id="105" name="Google Shape;105;p6"/>
+          <p:cNvPr id="104" name="Google Shape;104;p6"/>
           <p:cNvGrpSpPr/>
           <p:nvPr/>
         </p:nvGrpSpPr>
         <p:grpSpPr>
           <a:xfrm>
-            <a:off x="420125" y="647878"/>
-            <a:ext cx="8412480" cy="1007703"/>
-            <a:chOff x="365760" y="1234440"/>
-            <a:chExt cx="8412480" cy="482478"/>
+            <a:off x="300975" y="278828"/>
+            <a:ext cx="8714612" cy="718072"/>
+            <a:chOff x="365772" y="1057723"/>
+            <a:chExt cx="8412600" cy="343806"/>
           </a:xfrm>
         </p:grpSpPr>
         <p:sp>
           <p:nvSpPr>
-            <p:cNvPr id="106" name="Google Shape;106;p6"/>
+            <p:cNvPr id="105" name="Google Shape;105;p6"/>
             <p:cNvSpPr/>
             <p:nvPr/>
           </p:nvSpPr>
           <p:spPr>
             <a:xfrm>
-              <a:off x="365760" y="1234440"/>
-              <a:ext cx="8412480" cy="457200"/>
+              <a:off x="365772" y="1109029"/>
+              <a:ext cx="8412600" cy="292500"/>
             </a:xfrm>
             <a:prstGeom prst="rect">
               <a:avLst/>
@@ -9329,13 +9301,13 @@
         </p:sp>
         <p:sp>
           <p:nvSpPr>
-            <p:cNvPr id="107" name="Google Shape;107;p6"/>
+            <p:cNvPr id="106" name="Google Shape;106;p6"/>
             <p:cNvSpPr/>
             <p:nvPr/>
           </p:nvSpPr>
           <p:spPr>
             <a:xfrm>
-              <a:off x="418531" y="1268645"/>
+              <a:off x="418531" y="1057723"/>
               <a:ext cx="3840600" cy="292500"/>
             </a:xfrm>
             <a:prstGeom prst="rect">
@@ -9392,14 +9364,14 @@
         </p:sp>
         <p:sp>
           <p:nvSpPr>
-            <p:cNvPr id="108" name="Google Shape;108;p6"/>
+            <p:cNvPr id="107" name="Google Shape;107;p6"/>
             <p:cNvSpPr/>
             <p:nvPr/>
           </p:nvSpPr>
           <p:spPr>
             <a:xfrm>
-              <a:off x="4443481" y="1259718"/>
-              <a:ext cx="4308900" cy="457200"/>
+              <a:off x="4186314" y="1168514"/>
+              <a:ext cx="4591800" cy="219000"/>
             </a:xfrm>
             <a:prstGeom prst="rect">
               <a:avLst/>
@@ -9479,7 +9451,7 @@
       </p:grpSp>
       <p:sp>
         <p:nvSpPr>
-          <p:cNvPr id="109" name="Google Shape;109;p6"/>
+          <p:cNvPr id="108" name="Google Shape;108;p6"/>
           <p:cNvSpPr/>
           <p:nvPr/>
         </p:nvSpPr>
@@ -9542,7 +9514,7 @@
       </p:sp>
       <p:pic>
         <p:nvPicPr>
-          <p:cNvPr id="110" name="Google Shape;110;p6"/>
+          <p:cNvPr id="109" name="Google Shape;109;p6"/>
           <p:cNvPicPr preferRelativeResize="0"/>
           <p:nvPr/>
         </p:nvPicPr>
@@ -9555,8 +9527,92 @@
         </p:blipFill>
         <p:spPr>
           <a:xfrm>
-            <a:off x="940171" y="1747063"/>
+            <a:off x="976802" y="1080938"/>
             <a:ext cx="7263656" cy="3201644"/>
+          </a:xfrm>
+          <a:prstGeom prst="rect">
+            <a:avLst/>
+          </a:prstGeom>
+          <a:noFill/>
+          <a:ln>
+            <a:noFill/>
+          </a:ln>
+        </p:spPr>
+      </p:pic>
+      <p:pic>
+        <p:nvPicPr>
+          <p:cNvPr id="110" name="Google Shape;110;p6"/>
+          <p:cNvPicPr preferRelativeResize="0"/>
+          <p:nvPr/>
+        </p:nvPicPr>
+        <p:blipFill>
+          <a:blip r:embed="rId4">
+            <a:alphaModFix/>
+          </a:blip>
+          <a:stretch>
+            <a:fillRect/>
+          </a:stretch>
+        </p:blipFill>
+        <p:spPr>
+          <a:xfrm>
+            <a:off x="1455936" y="4342817"/>
+            <a:ext cx="1613849" cy="743450"/>
+          </a:xfrm>
+          <a:prstGeom prst="rect">
+            <a:avLst/>
+          </a:prstGeom>
+          <a:noFill/>
+          <a:ln>
+            <a:noFill/>
+          </a:ln>
+        </p:spPr>
+      </p:pic>
+      <p:pic>
+        <p:nvPicPr>
+          <p:cNvPr id="111" name="Google Shape;111;p6"/>
+          <p:cNvPicPr preferRelativeResize="0"/>
+          <p:nvPr/>
+        </p:nvPicPr>
+        <p:blipFill>
+          <a:blip r:embed="rId5">
+            <a:alphaModFix/>
+          </a:blip>
+          <a:stretch>
+            <a:fillRect/>
+          </a:stretch>
+        </p:blipFill>
+        <p:spPr>
+          <a:xfrm>
+            <a:off x="3932502" y="4342812"/>
+            <a:ext cx="1333349" cy="743450"/>
+          </a:xfrm>
+          <a:prstGeom prst="rect">
+            <a:avLst/>
+          </a:prstGeom>
+          <a:noFill/>
+          <a:ln>
+            <a:noFill/>
+          </a:ln>
+        </p:spPr>
+      </p:pic>
+      <p:pic>
+        <p:nvPicPr>
+          <p:cNvPr id="112" name="Google Shape;112;p6"/>
+          <p:cNvPicPr preferRelativeResize="0"/>
+          <p:nvPr/>
+        </p:nvPicPr>
+        <p:blipFill>
+          <a:blip r:embed="rId6">
+            <a:alphaModFix/>
+          </a:blip>
+          <a:stretch>
+            <a:fillRect/>
+          </a:stretch>
+        </p:blipFill>
+        <p:spPr>
+          <a:xfrm>
+            <a:off x="6088844" y="4319000"/>
+            <a:ext cx="1676075" cy="796350"/>
           </a:xfrm>
           <a:prstGeom prst="rect">
             <a:avLst/>
@@ -9587,7 +9643,7 @@
     </p:bg>
     <p:spTree>
       <p:nvGrpSpPr>
-        <p:cNvPr id="115" name="Shape 115"/>
+        <p:cNvPr id="117" name="Shape 117"/>
         <p:cNvGrpSpPr/>
         <p:nvPr/>
       </p:nvGrpSpPr>
@@ -9601,7 +9657,7 @@
       </p:grpSpPr>
       <p:sp>
         <p:nvSpPr>
-          <p:cNvPr id="116" name="Google Shape;116;p7"/>
+          <p:cNvPr id="118" name="Google Shape;118;p7"/>
           <p:cNvSpPr/>
           <p:nvPr/>
         </p:nvSpPr>
@@ -9650,7 +9706,7 @@
       </p:sp>
       <p:sp>
         <p:nvSpPr>
-          <p:cNvPr id="117" name="Google Shape;117;p7"/>
+          <p:cNvPr id="119" name="Google Shape;119;p7"/>
           <p:cNvSpPr/>
           <p:nvPr/>
         </p:nvSpPr>
@@ -9737,7 +9793,7 @@
       </p:sp>
       <p:sp>
         <p:nvSpPr>
-          <p:cNvPr id="118" name="Google Shape;118;p7"/>
+          <p:cNvPr id="120" name="Google Shape;120;p7"/>
           <p:cNvSpPr/>
           <p:nvPr/>
         </p:nvSpPr>
@@ -9800,7 +9856,7 @@
       </p:sp>
       <p:pic>
         <p:nvPicPr>
-          <p:cNvPr descr="/home/claude/content_unpacked/ppt/media/image8.png" id="119" name="Google Shape;119;p7"/>
+          <p:cNvPr descr="/home/claude/content_unpacked/ppt/media/image8.png" id="121" name="Google Shape;121;p7"/>
           <p:cNvPicPr preferRelativeResize="0"/>
           <p:nvPr/>
         </p:nvPicPr>
@@ -9827,7 +9883,7 @@
       </p:pic>
       <p:sp>
         <p:nvSpPr>
-          <p:cNvPr id="120" name="Google Shape;120;p7"/>
+          <p:cNvPr id="122" name="Google Shape;122;p7"/>
           <p:cNvSpPr/>
           <p:nvPr/>
         </p:nvSpPr>
@@ -9883,7 +9939,7 @@
       </p:sp>
       <p:sp>
         <p:nvSpPr>
-          <p:cNvPr id="121" name="Google Shape;121;p7"/>
+          <p:cNvPr id="123" name="Google Shape;123;p7"/>
           <p:cNvSpPr/>
           <p:nvPr/>
         </p:nvSpPr>
@@ -9932,7 +9988,7 @@
       </p:sp>
       <p:sp>
         <p:nvSpPr>
-          <p:cNvPr id="122" name="Google Shape;122;p7"/>
+          <p:cNvPr id="124" name="Google Shape;124;p7"/>
           <p:cNvSpPr/>
           <p:nvPr/>
         </p:nvSpPr>
@@ -9995,7 +10051,7 @@
       </p:sp>
       <p:sp>
         <p:nvSpPr>
-          <p:cNvPr id="123" name="Google Shape;123;p7"/>
+          <p:cNvPr id="125" name="Google Shape;125;p7"/>
           <p:cNvSpPr/>
           <p:nvPr/>
         </p:nvSpPr>
@@ -10065,7 +10121,7 @@
       </p:sp>
       <p:sp>
         <p:nvSpPr>
-          <p:cNvPr id="124" name="Google Shape;124;p7"/>
+          <p:cNvPr id="126" name="Google Shape;126;p7"/>
           <p:cNvSpPr/>
           <p:nvPr/>
         </p:nvSpPr>
@@ -10128,7 +10184,7 @@
       </p:sp>
       <p:sp>
         <p:nvSpPr>
-          <p:cNvPr id="125" name="Google Shape;125;p7"/>
+          <p:cNvPr id="127" name="Google Shape;127;p7"/>
           <p:cNvSpPr/>
           <p:nvPr/>
         </p:nvSpPr>
@@ -10198,7 +10254,7 @@
       </p:sp>
       <p:sp>
         <p:nvSpPr>
-          <p:cNvPr id="126" name="Google Shape;126;p7"/>
+          <p:cNvPr id="128" name="Google Shape;128;p7"/>
           <p:cNvSpPr/>
           <p:nvPr/>
         </p:nvSpPr>
@@ -10279,7 +10335,7 @@
     </p:bg>
     <p:spTree>
       <p:nvGrpSpPr>
-        <p:cNvPr id="131" name="Shape 131"/>
+        <p:cNvPr id="133" name="Shape 133"/>
         <p:cNvGrpSpPr/>
         <p:nvPr/>
       </p:nvGrpSpPr>
@@ -10293,7 +10349,7 @@
       </p:grpSpPr>
       <p:sp>
         <p:nvSpPr>
-          <p:cNvPr id="132" name="Google Shape;132;p8"/>
+          <p:cNvPr id="134" name="Google Shape;134;p8"/>
           <p:cNvSpPr/>
           <p:nvPr/>
         </p:nvSpPr>
@@ -10342,7 +10398,7 @@
       </p:sp>
       <p:sp>
         <p:nvSpPr>
-          <p:cNvPr id="133" name="Google Shape;133;p8"/>
+          <p:cNvPr id="135" name="Google Shape;135;p8"/>
           <p:cNvSpPr/>
           <p:nvPr/>
         </p:nvSpPr>
@@ -10405,7 +10461,7 @@
       </p:sp>
       <p:sp>
         <p:nvSpPr>
-          <p:cNvPr id="134" name="Google Shape;134;p8"/>
+          <p:cNvPr id="136" name="Google Shape;136;p8"/>
           <p:cNvSpPr/>
           <p:nvPr/>
         </p:nvSpPr>
@@ -10468,13 +10524,13 @@
       </p:sp>
       <p:grpSp>
         <p:nvGrpSpPr>
-          <p:cNvPr id="135" name="Google Shape;135;p8"/>
+          <p:cNvPr id="137" name="Google Shape;137;p8"/>
           <p:cNvGrpSpPr/>
           <p:nvPr/>
         </p:nvGrpSpPr>
         <p:grpSpPr>
           <a:xfrm>
-            <a:off x="6809886" y="945607"/>
+            <a:off x="6611499" y="929469"/>
             <a:ext cx="2060864" cy="1688304"/>
             <a:chOff x="4632807" y="566116"/>
             <a:chExt cx="2060864" cy="1688304"/>
@@ -10482,7 +10538,7 @@
         </p:grpSpPr>
         <p:sp>
           <p:nvSpPr>
-            <p:cNvPr id="136" name="Google Shape;136;p8"/>
+            <p:cNvPr id="138" name="Google Shape;138;p8"/>
             <p:cNvSpPr/>
             <p:nvPr/>
           </p:nvSpPr>
@@ -10538,7 +10594,7 @@
         </p:sp>
         <p:sp>
           <p:nvSpPr>
-            <p:cNvPr id="137" name="Google Shape;137;p8"/>
+            <p:cNvPr id="139" name="Google Shape;139;p8"/>
             <p:cNvSpPr/>
             <p:nvPr/>
           </p:nvSpPr>
@@ -10587,7 +10643,7 @@
         </p:sp>
         <p:sp>
           <p:nvSpPr>
-            <p:cNvPr id="138" name="Google Shape;138;p8"/>
+            <p:cNvPr id="140" name="Google Shape;140;p8"/>
             <p:cNvSpPr/>
             <p:nvPr/>
           </p:nvSpPr>
@@ -10687,7 +10743,7 @@
         </p:sp>
         <p:sp>
           <p:nvSpPr>
-            <p:cNvPr id="139" name="Google Shape;139;p8"/>
+            <p:cNvPr id="141" name="Google Shape;141;p8"/>
             <p:cNvSpPr/>
             <p:nvPr/>
           </p:nvSpPr>
@@ -10750,7 +10806,7 @@
         </p:sp>
         <p:sp>
           <p:nvSpPr>
-            <p:cNvPr id="140" name="Google Shape;140;p8"/>
+            <p:cNvPr id="142" name="Google Shape;142;p8"/>
             <p:cNvSpPr/>
             <p:nvPr/>
           </p:nvSpPr>
@@ -10813,7 +10869,7 @@
         </p:sp>
         <p:sp>
           <p:nvSpPr>
-            <p:cNvPr id="141" name="Google Shape;141;p8"/>
+            <p:cNvPr id="143" name="Google Shape;143;p8"/>
             <p:cNvSpPr/>
             <p:nvPr/>
           </p:nvSpPr>
@@ -10862,7 +10918,7 @@
         </p:sp>
         <p:sp>
           <p:nvSpPr>
-            <p:cNvPr id="142" name="Google Shape;142;p8"/>
+            <p:cNvPr id="144" name="Google Shape;144;p8"/>
             <p:cNvSpPr/>
             <p:nvPr/>
           </p:nvSpPr>
@@ -10926,13 +10982,13 @@
       </p:grpSp>
       <p:grpSp>
         <p:nvGrpSpPr>
-          <p:cNvPr id="143" name="Google Shape;143;p8"/>
+          <p:cNvPr id="145" name="Google Shape;145;p8"/>
           <p:cNvGrpSpPr/>
           <p:nvPr/>
         </p:nvGrpSpPr>
         <p:grpSpPr>
           <a:xfrm>
-            <a:off x="4560785" y="2843331"/>
+            <a:off x="4560785" y="2935056"/>
             <a:ext cx="2047796" cy="1723268"/>
             <a:chOff x="6906050" y="566116"/>
             <a:chExt cx="2047796" cy="1723268"/>
@@ -10940,7 +10996,7 @@
         </p:grpSpPr>
         <p:sp>
           <p:nvSpPr>
-            <p:cNvPr id="144" name="Google Shape;144;p8"/>
+            <p:cNvPr id="146" name="Google Shape;146;p8"/>
             <p:cNvSpPr/>
             <p:nvPr/>
           </p:nvSpPr>
@@ -10996,7 +11052,7 @@
         </p:sp>
         <p:sp>
           <p:nvSpPr>
-            <p:cNvPr id="145" name="Google Shape;145;p8"/>
+            <p:cNvPr id="147" name="Google Shape;147;p8"/>
             <p:cNvSpPr/>
             <p:nvPr/>
           </p:nvSpPr>
@@ -11045,7 +11101,7 @@
         </p:sp>
         <p:sp>
           <p:nvSpPr>
-            <p:cNvPr id="146" name="Google Shape;146;p8"/>
+            <p:cNvPr id="148" name="Google Shape;148;p8"/>
             <p:cNvSpPr/>
             <p:nvPr/>
           </p:nvSpPr>
@@ -11145,7 +11201,7 @@
         </p:sp>
         <p:sp>
           <p:nvSpPr>
-            <p:cNvPr id="147" name="Google Shape;147;p8"/>
+            <p:cNvPr id="149" name="Google Shape;149;p8"/>
             <p:cNvSpPr/>
             <p:nvPr/>
           </p:nvSpPr>
@@ -11208,7 +11264,7 @@
         </p:sp>
         <p:sp>
           <p:nvSpPr>
-            <p:cNvPr id="148" name="Google Shape;148;p8"/>
+            <p:cNvPr id="150" name="Google Shape;150;p8"/>
             <p:cNvSpPr/>
             <p:nvPr/>
           </p:nvSpPr>
@@ -11271,7 +11327,7 @@
         </p:sp>
         <p:sp>
           <p:nvSpPr>
-            <p:cNvPr id="149" name="Google Shape;149;p8"/>
+            <p:cNvPr id="151" name="Google Shape;151;p8"/>
             <p:cNvSpPr/>
             <p:nvPr/>
           </p:nvSpPr>
@@ -11320,7 +11376,7 @@
         </p:sp>
         <p:sp>
           <p:nvSpPr>
-            <p:cNvPr id="150" name="Google Shape;150;p8"/>
+            <p:cNvPr id="152" name="Google Shape;152;p8"/>
             <p:cNvSpPr/>
             <p:nvPr/>
           </p:nvSpPr>
@@ -11384,13 +11440,13 @@
       </p:grpSp>
       <p:grpSp>
         <p:nvGrpSpPr>
-          <p:cNvPr id="151" name="Google Shape;151;p8"/>
+          <p:cNvPr id="153" name="Google Shape;153;p8"/>
           <p:cNvGrpSpPr/>
           <p:nvPr/>
         </p:nvGrpSpPr>
         <p:grpSpPr>
           <a:xfrm>
-            <a:off x="6816396" y="2827061"/>
+            <a:off x="6608571" y="2925386"/>
             <a:ext cx="2066700" cy="1742623"/>
             <a:chOff x="6858687" y="2825542"/>
             <a:chExt cx="2066700" cy="1742623"/>
@@ -11398,7 +11454,7 @@
         </p:grpSpPr>
         <p:sp>
           <p:nvSpPr>
-            <p:cNvPr id="152" name="Google Shape;152;p8"/>
+            <p:cNvPr id="154" name="Google Shape;154;p8"/>
             <p:cNvSpPr/>
             <p:nvPr/>
           </p:nvSpPr>
@@ -11454,7 +11510,7 @@
         </p:sp>
         <p:sp>
           <p:nvSpPr>
-            <p:cNvPr id="153" name="Google Shape;153;p8"/>
+            <p:cNvPr id="155" name="Google Shape;155;p8"/>
             <p:cNvSpPr/>
             <p:nvPr/>
           </p:nvSpPr>
@@ -11503,7 +11559,7 @@
         </p:sp>
         <p:sp>
           <p:nvSpPr>
-            <p:cNvPr id="154" name="Google Shape;154;p8"/>
+            <p:cNvPr id="156" name="Google Shape;156;p8"/>
             <p:cNvSpPr/>
             <p:nvPr/>
           </p:nvSpPr>
@@ -11603,7 +11659,7 @@
         </p:sp>
         <p:sp>
           <p:nvSpPr>
-            <p:cNvPr id="155" name="Google Shape;155;p8"/>
+            <p:cNvPr id="157" name="Google Shape;157;p8"/>
             <p:cNvSpPr/>
             <p:nvPr/>
           </p:nvSpPr>
@@ -11666,7 +11722,7 @@
         </p:sp>
         <p:sp>
           <p:nvSpPr>
-            <p:cNvPr id="156" name="Google Shape;156;p8"/>
+            <p:cNvPr id="158" name="Google Shape;158;p8"/>
             <p:cNvSpPr/>
             <p:nvPr/>
           </p:nvSpPr>
@@ -11729,7 +11785,7 @@
         </p:sp>
         <p:sp>
           <p:nvSpPr>
-            <p:cNvPr id="157" name="Google Shape;157;p8"/>
+            <p:cNvPr id="159" name="Google Shape;159;p8"/>
             <p:cNvSpPr/>
             <p:nvPr/>
           </p:nvSpPr>
@@ -11778,7 +11834,7 @@
         </p:sp>
         <p:sp>
           <p:nvSpPr>
-            <p:cNvPr id="158" name="Google Shape;158;p8"/>
+            <p:cNvPr id="160" name="Google Shape;160;p8"/>
             <p:cNvSpPr/>
             <p:nvPr/>
           </p:nvSpPr>
@@ -11842,7 +11898,7 @@
       </p:grpSp>
       <p:sp>
         <p:nvSpPr>
-          <p:cNvPr id="159" name="Google Shape;159;p8"/>
+          <p:cNvPr id="161" name="Google Shape;161;p8"/>
           <p:cNvSpPr/>
           <p:nvPr/>
         </p:nvSpPr>
@@ -11905,7 +11961,7 @@
       </p:sp>
       <p:pic>
         <p:nvPicPr>
-          <p:cNvPr id="160" name="Google Shape;160;p8"/>
+          <p:cNvPr id="162" name="Google Shape;162;p8"/>
           <p:cNvPicPr preferRelativeResize="0"/>
           <p:nvPr/>
         </p:nvPicPr>
@@ -11932,7 +11988,7 @@
       </p:pic>
       <p:pic>
         <p:nvPicPr>
-          <p:cNvPr id="161" name="Google Shape;161;p8"/>
+          <p:cNvPr id="163" name="Google Shape;163;p8"/>
           <p:cNvPicPr preferRelativeResize="0"/>
           <p:nvPr/>
         </p:nvPicPr>
@@ -11977,7 +12033,7 @@
     </p:bg>
     <p:spTree>
       <p:nvGrpSpPr>
-        <p:cNvPr id="166" name="Shape 166"/>
+        <p:cNvPr id="168" name="Shape 168"/>
         <p:cNvGrpSpPr/>
         <p:nvPr/>
       </p:nvGrpSpPr>
@@ -11991,7 +12047,7 @@
       </p:grpSpPr>
       <p:sp>
         <p:nvSpPr>
-          <p:cNvPr id="167" name="Google Shape;167;p9"/>
+          <p:cNvPr id="169" name="Google Shape;169;p9"/>
           <p:cNvSpPr/>
           <p:nvPr/>
         </p:nvSpPr>
@@ -12040,7 +12096,7 @@
       </p:sp>
       <p:sp>
         <p:nvSpPr>
-          <p:cNvPr id="168" name="Google Shape;168;p9"/>
+          <p:cNvPr id="170" name="Google Shape;170;p9"/>
           <p:cNvSpPr/>
           <p:nvPr/>
         </p:nvSpPr>
@@ -12103,7 +12159,7 @@
       </p:sp>
       <p:sp>
         <p:nvSpPr>
-          <p:cNvPr id="169" name="Google Shape;169;p9"/>
+          <p:cNvPr id="171" name="Google Shape;171;p9"/>
           <p:cNvSpPr/>
           <p:nvPr/>
         </p:nvSpPr>
@@ -12159,7 +12215,7 @@
       </p:sp>
       <p:sp>
         <p:nvSpPr>
-          <p:cNvPr id="170" name="Google Shape;170;p9"/>
+          <p:cNvPr id="172" name="Google Shape;172;p9"/>
           <p:cNvSpPr/>
           <p:nvPr/>
         </p:nvSpPr>
@@ -12208,7 +12264,7 @@
       </p:sp>
       <p:sp>
         <p:nvSpPr>
-          <p:cNvPr id="171" name="Google Shape;171;p9"/>
+          <p:cNvPr id="173" name="Google Shape;173;p9"/>
           <p:cNvSpPr/>
           <p:nvPr/>
         </p:nvSpPr>
@@ -12271,7 +12327,7 @@
       </p:sp>
       <p:sp>
         <p:nvSpPr>
-          <p:cNvPr id="172" name="Google Shape;172;p9"/>
+          <p:cNvPr id="174" name="Google Shape;174;p9"/>
           <p:cNvSpPr/>
           <p:nvPr/>
         </p:nvSpPr>
@@ -12399,7 +12455,7 @@
       </p:sp>
       <p:sp>
         <p:nvSpPr>
-          <p:cNvPr id="173" name="Google Shape;173;p9"/>
+          <p:cNvPr id="175" name="Google Shape;175;p9"/>
           <p:cNvSpPr/>
           <p:nvPr/>
         </p:nvSpPr>
@@ -12463,7 +12519,7 @@
       </p:sp>
       <p:sp>
         <p:nvSpPr>
-          <p:cNvPr id="174" name="Google Shape;174;p9"/>
+          <p:cNvPr id="176" name="Google Shape;176;p9"/>
           <p:cNvSpPr/>
           <p:nvPr/>
         </p:nvSpPr>
@@ -12512,7 +12568,7 @@
       </p:sp>
       <p:sp>
         <p:nvSpPr>
-          <p:cNvPr id="175" name="Google Shape;175;p9"/>
+          <p:cNvPr id="177" name="Google Shape;177;p9"/>
           <p:cNvSpPr/>
           <p:nvPr/>
         </p:nvSpPr>
@@ -12575,7 +12631,7 @@
       </p:sp>
       <p:sp>
         <p:nvSpPr>
-          <p:cNvPr id="176" name="Google Shape;176;p9"/>
+          <p:cNvPr id="178" name="Google Shape;178;p9"/>
           <p:cNvSpPr/>
           <p:nvPr/>
         </p:nvSpPr>
@@ -12696,7 +12752,7 @@
       </p:sp>
       <p:sp>
         <p:nvSpPr>
-          <p:cNvPr id="177" name="Google Shape;177;p9"/>
+          <p:cNvPr id="179" name="Google Shape;179;p9"/>
           <p:cNvSpPr/>
           <p:nvPr/>
         </p:nvSpPr>
@@ -12766,6 +12822,285 @@
 </file>
 
 <file path=ppt/theme/theme1.xml><?xml version="1.0" encoding="utf-8"?>
+<a:theme xmlns:a="http://schemas.openxmlformats.org/drawingml/2006/main" xmlns:r="http://schemas.openxmlformats.org/officeDocument/2006/relationships" name="Office Theme">
+  <a:themeElements>
+    <a:clrScheme name="Office">
+      <a:dk1>
+        <a:srgbClr val="000000"/>
+      </a:dk1>
+      <a:lt1>
+        <a:srgbClr val="FFFFFF"/>
+      </a:lt1>
+      <a:dk2>
+        <a:srgbClr val="44546A"/>
+      </a:dk2>
+      <a:lt2>
+        <a:srgbClr val="E7E6E6"/>
+      </a:lt2>
+      <a:accent1>
+        <a:srgbClr val="4472C4"/>
+      </a:accent1>
+      <a:accent2>
+        <a:srgbClr val="ED7D31"/>
+      </a:accent2>
+      <a:accent3>
+        <a:srgbClr val="A5A5A5"/>
+      </a:accent3>
+      <a:accent4>
+        <a:srgbClr val="FFC000"/>
+      </a:accent4>
+      <a:accent5>
+        <a:srgbClr val="5B9BD5"/>
+      </a:accent5>
+      <a:accent6>
+        <a:srgbClr val="70AD47"/>
+      </a:accent6>
+      <a:hlink>
+        <a:srgbClr val="0563C1"/>
+      </a:hlink>
+      <a:folHlink>
+        <a:srgbClr val="954F72"/>
+      </a:folHlink>
+    </a:clrScheme>
+    <a:fontScheme name="Office">
+      <a:majorFont>
+        <a:latin typeface="Arial"/>
+        <a:ea typeface=""/>
+        <a:cs typeface=""/>
+        <a:font script="Jpan" typeface="ＭＳ Ｐゴシック"/>
+        <a:font script="Hang" typeface="맑은 고딕"/>
+        <a:font script="Hans" typeface="宋体"/>
+        <a:font script="Hant" typeface="新細明體"/>
+        <a:font script="Arab" typeface="Times New Roman"/>
+        <a:font script="Hebr" typeface="Times New Roman"/>
+        <a:font script="Thai" typeface="Angsana New"/>
+        <a:font script="Ethi" typeface="Nyala"/>
+        <a:font script="Beng" typeface="Vrinda"/>
+        <a:font script="Gujr" typeface="Shruti"/>
+        <a:font script="Khmr" typeface="MoolBoran"/>
+        <a:font script="Knda" typeface="Tunga"/>
+        <a:font script="Guru" typeface="Raavi"/>
+        <a:font script="Cans" typeface="Euphemia"/>
+        <a:font script="Cher" typeface="Plantagenet Cherokee"/>
+        <a:font script="Yiii" typeface="Microsoft Yi Baiti"/>
+        <a:font script="Tibt" typeface="Microsoft Himalaya"/>
+        <a:font script="Thaa" typeface="MV Boli"/>
+        <a:font script="Deva" typeface="Mangal"/>
+        <a:font script="Telu" typeface="Gautami"/>
+        <a:font script="Taml" typeface="Latha"/>
+        <a:font script="Syrc" typeface="Estrangelo Edessa"/>
+        <a:font script="Orya" typeface="Kalinga"/>
+        <a:font script="Mlym" typeface="Kartika"/>
+        <a:font script="Laoo" typeface="DokChampa"/>
+        <a:font script="Sinh" typeface="Iskoola Pota"/>
+        <a:font script="Mong" typeface="Mongolian Baiti"/>
+        <a:font script="Viet" typeface="Times New Roman"/>
+        <a:font script="Uigh" typeface="Microsoft Uighur"/>
+        <a:font script="Geor" typeface="Sylfaen"/>
+      </a:majorFont>
+      <a:minorFont>
+        <a:latin typeface="Arial"/>
+        <a:ea typeface=""/>
+        <a:cs typeface=""/>
+        <a:font script="Jpan" typeface="ＭＳ Ｐゴシック"/>
+        <a:font script="Hang" typeface="맑은 고딕"/>
+        <a:font script="Hans" typeface="宋体"/>
+        <a:font script="Hant" typeface="新細明體"/>
+        <a:font script="Arab" typeface="Arial"/>
+        <a:font script="Hebr" typeface="Arial"/>
+        <a:font script="Thai" typeface="Cordia New"/>
+        <a:font script="Ethi" typeface="Nyala"/>
+        <a:font script="Beng" typeface="Vrinda"/>
+        <a:font script="Gujr" typeface="Shruti"/>
+        <a:font script="Khmr" typeface="DaunPenh"/>
+        <a:font script="Knda" typeface="Tunga"/>
+        <a:font script="Guru" typeface="Raavi"/>
+        <a:font script="Cans" typeface="Euphemia"/>
+        <a:font script="Cher" typeface="Plantagenet Cherokee"/>
+        <a:font script="Yiii" typeface="Microsoft Yi Baiti"/>
+        <a:font script="Tibt" typeface="Microsoft Himalaya"/>
+        <a:font script="Thaa" typeface="MV Boli"/>
+        <a:font script="Deva" typeface="Mangal"/>
+        <a:font script="Telu" typeface="Gautami"/>
+        <a:font script="Taml" typeface="Latha"/>
+        <a:font script="Syrc" typeface="Estrangelo Edessa"/>
+        <a:font script="Orya" typeface="Kalinga"/>
+        <a:font script="Mlym" typeface="Kartika"/>
+        <a:font script="Laoo" typeface="DokChampa"/>
+        <a:font script="Sinh" typeface="Iskoola Pota"/>
+        <a:font script="Mong" typeface="Mongolian Baiti"/>
+        <a:font script="Viet" typeface="Arial"/>
+        <a:font script="Uigh" typeface="Microsoft Uighur"/>
+        <a:font script="Geor" typeface="Sylfaen"/>
+      </a:minorFont>
+    </a:fontScheme>
+    <a:fmtScheme name="Office">
+      <a:fillStyleLst>
+        <a:solidFill>
+          <a:schemeClr val="phClr"/>
+        </a:solidFill>
+        <a:gradFill rotWithShape="1">
+          <a:gsLst>
+            <a:gs pos="0">
+              <a:schemeClr val="phClr">
+                <a:tint val="50000"/>
+                <a:satMod val="300000"/>
+              </a:schemeClr>
+            </a:gs>
+            <a:gs pos="35000">
+              <a:schemeClr val="phClr">
+                <a:tint val="37000"/>
+                <a:satMod val="300000"/>
+              </a:schemeClr>
+            </a:gs>
+            <a:gs pos="100000">
+              <a:schemeClr val="phClr">
+                <a:tint val="15000"/>
+                <a:satMod val="350000"/>
+              </a:schemeClr>
+            </a:gs>
+          </a:gsLst>
+          <a:lin ang="16200000" scaled="1"/>
+        </a:gradFill>
+        <a:gradFill rotWithShape="1">
+          <a:gsLst>
+            <a:gs pos="0">
+              <a:schemeClr val="phClr">
+                <a:tint val="100000"/>
+                <a:shade val="100000"/>
+                <a:satMod val="130000"/>
+              </a:schemeClr>
+            </a:gs>
+            <a:gs pos="100000">
+              <a:schemeClr val="phClr">
+                <a:tint val="50000"/>
+                <a:shade val="100000"/>
+                <a:satMod val="350000"/>
+              </a:schemeClr>
+            </a:gs>
+          </a:gsLst>
+          <a:lin ang="16200000" scaled="0"/>
+        </a:gradFill>
+      </a:fillStyleLst>
+      <a:lnStyleLst>
+        <a:ln w="9525" cap="flat" cmpd="sng" algn="ctr">
+          <a:solidFill>
+            <a:schemeClr val="phClr">
+              <a:shade val="95000"/>
+              <a:satMod val="105000"/>
+            </a:schemeClr>
+          </a:solidFill>
+          <a:prstDash val="solid"/>
+        </a:ln>
+        <a:ln w="25400" cap="flat" cmpd="sng" algn="ctr">
+          <a:solidFill>
+            <a:schemeClr val="phClr"/>
+          </a:solidFill>
+          <a:prstDash val="solid"/>
+        </a:ln>
+        <a:ln w="38100" cap="flat" cmpd="sng" algn="ctr">
+          <a:solidFill>
+            <a:schemeClr val="phClr"/>
+          </a:solidFill>
+          <a:prstDash val="solid"/>
+        </a:ln>
+      </a:lnStyleLst>
+      <a:effectStyleLst>
+        <a:effectStyle>
+          <a:effectLst>
+            <a:outerShdw blurRad="40000" dist="20000" dir="5400000" rotWithShape="0">
+              <a:srgbClr val="000000">
+                <a:alpha val="38000"/>
+              </a:srgbClr>
+            </a:outerShdw>
+          </a:effectLst>
+        </a:effectStyle>
+        <a:effectStyle>
+          <a:effectLst>
+            <a:outerShdw blurRad="40000" dist="23000" dir="5400000" rotWithShape="0">
+              <a:srgbClr val="000000">
+                <a:alpha val="35000"/>
+              </a:srgbClr>
+            </a:outerShdw>
+          </a:effectLst>
+        </a:effectStyle>
+        <a:effectStyle>
+          <a:effectLst>
+            <a:outerShdw blurRad="40000" dist="23000" dir="5400000" rotWithShape="0">
+              <a:srgbClr val="000000">
+                <a:alpha val="35000"/>
+              </a:srgbClr>
+            </a:outerShdw>
+          </a:effectLst>
+          <a:scene3d>
+            <a:camera prst="orthographicFront">
+              <a:rot lat="0" lon="0" rev="0"/>
+            </a:camera>
+            <a:lightRig rig="threePt" dir="t">
+              <a:rot lat="0" lon="0" rev="1200000"/>
+            </a:lightRig>
+          </a:scene3d>
+          <a:sp3d>
+            <a:bevelT w="63500" h="25400"/>
+          </a:sp3d>
+        </a:effectStyle>
+      </a:effectStyleLst>
+      <a:bgFillStyleLst>
+        <a:solidFill>
+          <a:schemeClr val="phClr"/>
+        </a:solidFill>
+        <a:gradFill rotWithShape="1">
+          <a:gsLst>
+            <a:gs pos="0">
+              <a:schemeClr val="phClr">
+                <a:tint val="40000"/>
+                <a:satMod val="350000"/>
+              </a:schemeClr>
+            </a:gs>
+            <a:gs pos="40000">
+              <a:schemeClr val="phClr">
+                <a:tint val="45000"/>
+                <a:shade val="99000"/>
+                <a:satMod val="350000"/>
+              </a:schemeClr>
+            </a:gs>
+            <a:gs pos="100000">
+              <a:schemeClr val="phClr">
+                <a:shade val="20000"/>
+                <a:satMod val="255000"/>
+              </a:schemeClr>
+            </a:gs>
+          </a:gsLst>
+          <a:path path="circle">
+            <a:fillToRect l="50000" t="-80000" r="50000" b="180000"/>
+          </a:path>
+        </a:gradFill>
+        <a:gradFill rotWithShape="1">
+          <a:gsLst>
+            <a:gs pos="0">
+              <a:schemeClr val="phClr">
+                <a:tint val="80000"/>
+                <a:satMod val="300000"/>
+              </a:schemeClr>
+            </a:gs>
+            <a:gs pos="100000">
+              <a:schemeClr val="phClr">
+                <a:shade val="30000"/>
+                <a:satMod val="200000"/>
+              </a:schemeClr>
+            </a:gs>
+          </a:gsLst>
+          <a:path path="circle">
+            <a:fillToRect l="50000" t="50000" r="50000" b="50000"/>
+          </a:path>
+        </a:gradFill>
+      </a:bgFillStyleLst>
+    </a:fmtScheme>
+  </a:themeElements>
+</a:theme>
+</file>
+
+<file path=ppt/theme/theme2.xml><?xml version="1.0" encoding="utf-8"?>
 <a:theme xmlns:a="http://schemas.openxmlformats.org/drawingml/2006/main" xmlns:r="http://schemas.openxmlformats.org/officeDocument/2006/relationships" name="Tema de Office">
   <a:themeElements>
     <a:clrScheme name="Office">
@@ -13042,283 +13377,4 @@
     </a:fmtScheme>
   </a:themeElements>
 </a:theme>
-</file>
-
-<file path=ppt/theme/theme2.xml><?xml version="1.0" encoding="utf-8"?>
-<a:theme xmlns:a="http://schemas.openxmlformats.org/drawingml/2006/main" xmlns:r="http://schemas.openxmlformats.org/officeDocument/2006/relationships" name="Office Theme">
-  <a:themeElements>
-    <a:clrScheme name="Office">
-      <a:dk1>
-        <a:srgbClr val="000000"/>
-      </a:dk1>
-      <a:lt1>
-        <a:srgbClr val="FFFFFF"/>
-      </a:lt1>
-      <a:dk2>
-        <a:srgbClr val="44546A"/>
-      </a:dk2>
-      <a:lt2>
-        <a:srgbClr val="E7E6E6"/>
-      </a:lt2>
-      <a:accent1>
-        <a:srgbClr val="4472C4"/>
-      </a:accent1>
-      <a:accent2>
-        <a:srgbClr val="ED7D31"/>
-      </a:accent2>
-      <a:accent3>
-        <a:srgbClr val="A5A5A5"/>
-      </a:accent3>
-      <a:accent4>
-        <a:srgbClr val="FFC000"/>
-      </a:accent4>
-      <a:accent5>
-        <a:srgbClr val="5B9BD5"/>
-      </a:accent5>
-      <a:accent6>
-        <a:srgbClr val="70AD47"/>
-      </a:accent6>
-      <a:hlink>
-        <a:srgbClr val="0563C1"/>
-      </a:hlink>
-      <a:folHlink>
-        <a:srgbClr val="954F72"/>
-      </a:folHlink>
-    </a:clrScheme>
-    <a:fontScheme name="Office">
-      <a:majorFont>
-        <a:latin typeface="Arial"/>
-        <a:ea typeface=""/>
-        <a:cs typeface=""/>
-        <a:font script="Jpan" typeface="ＭＳ Ｐゴシック"/>
-        <a:font script="Hang" typeface="맑은 고딕"/>
-        <a:font script="Hans" typeface="宋体"/>
-        <a:font script="Hant" typeface="新細明體"/>
-        <a:font script="Arab" typeface="Times New Roman"/>
-        <a:font script="Hebr" typeface="Times New Roman"/>
-        <a:font script="Thai" typeface="Angsana New"/>
-        <a:font script="Ethi" typeface="Nyala"/>
-        <a:font script="Beng" typeface="Vrinda"/>
-        <a:font script="Gujr" typeface="Shruti"/>
-        <a:font script="Khmr" typeface="MoolBoran"/>
-        <a:font script="Knda" typeface="Tunga"/>
-        <a:font script="Guru" typeface="Raavi"/>
-        <a:font script="Cans" typeface="Euphemia"/>
-        <a:font script="Cher" typeface="Plantagenet Cherokee"/>
-        <a:font script="Yiii" typeface="Microsoft Yi Baiti"/>
-        <a:font script="Tibt" typeface="Microsoft Himalaya"/>
-        <a:font script="Thaa" typeface="MV Boli"/>
-        <a:font script="Deva" typeface="Mangal"/>
-        <a:font script="Telu" typeface="Gautami"/>
-        <a:font script="Taml" typeface="Latha"/>
-        <a:font script="Syrc" typeface="Estrangelo Edessa"/>
-        <a:font script="Orya" typeface="Kalinga"/>
-        <a:font script="Mlym" typeface="Kartika"/>
-        <a:font script="Laoo" typeface="DokChampa"/>
-        <a:font script="Sinh" typeface="Iskoola Pota"/>
-        <a:font script="Mong" typeface="Mongolian Baiti"/>
-        <a:font script="Viet" typeface="Times New Roman"/>
-        <a:font script="Uigh" typeface="Microsoft Uighur"/>
-        <a:font script="Geor" typeface="Sylfaen"/>
-      </a:majorFont>
-      <a:minorFont>
-        <a:latin typeface="Arial"/>
-        <a:ea typeface=""/>
-        <a:cs typeface=""/>
-        <a:font script="Jpan" typeface="ＭＳ Ｐゴシック"/>
-        <a:font script="Hang" typeface="맑은 고딕"/>
-        <a:font script="Hans" typeface="宋体"/>
-        <a:font script="Hant" typeface="新細明體"/>
-        <a:font script="Arab" typeface="Arial"/>
-        <a:font script="Hebr" typeface="Arial"/>
-        <a:font script="Thai" typeface="Cordia New"/>
-        <a:font script="Ethi" typeface="Nyala"/>
-        <a:font script="Beng" typeface="Vrinda"/>
-        <a:font script="Gujr" typeface="Shruti"/>
-        <a:font script="Khmr" typeface="DaunPenh"/>
-        <a:font script="Knda" typeface="Tunga"/>
-        <a:font script="Guru" typeface="Raavi"/>
-        <a:font script="Cans" typeface="Euphemia"/>
-        <a:font script="Cher" typeface="Plantagenet Cherokee"/>
-        <a:font script="Yiii" typeface="Microsoft Yi Baiti"/>
-        <a:font script="Tibt" typeface="Microsoft Himalaya"/>
-        <a:font script="Thaa" typeface="MV Boli"/>
-        <a:font script="Deva" typeface="Mangal"/>
-        <a:font script="Telu" typeface="Gautami"/>
-        <a:font script="Taml" typeface="Latha"/>
-        <a:font script="Syrc" typeface="Estrangelo Edessa"/>
-        <a:font script="Orya" typeface="Kalinga"/>
-        <a:font script="Mlym" typeface="Kartika"/>
-        <a:font script="Laoo" typeface="DokChampa"/>
-        <a:font script="Sinh" typeface="Iskoola Pota"/>
-        <a:font script="Mong" typeface="Mongolian Baiti"/>
-        <a:font script="Viet" typeface="Arial"/>
-        <a:font script="Uigh" typeface="Microsoft Uighur"/>
-        <a:font script="Geor" typeface="Sylfaen"/>
-      </a:minorFont>
-    </a:fontScheme>
-    <a:fmtScheme name="Office">
-      <a:fillStyleLst>
-        <a:solidFill>
-          <a:schemeClr val="phClr"/>
-        </a:solidFill>
-        <a:gradFill rotWithShape="1">
-          <a:gsLst>
-            <a:gs pos="0">
-              <a:schemeClr val="phClr">
-                <a:tint val="50000"/>
-                <a:satMod val="300000"/>
-              </a:schemeClr>
-            </a:gs>
-            <a:gs pos="35000">
-              <a:schemeClr val="phClr">
-                <a:tint val="37000"/>
-                <a:satMod val="300000"/>
-              </a:schemeClr>
-            </a:gs>
-            <a:gs pos="100000">
-              <a:schemeClr val="phClr">
-                <a:tint val="15000"/>
-                <a:satMod val="350000"/>
-              </a:schemeClr>
-            </a:gs>
-          </a:gsLst>
-          <a:lin ang="16200000" scaled="1"/>
-        </a:gradFill>
-        <a:gradFill rotWithShape="1">
-          <a:gsLst>
-            <a:gs pos="0">
-              <a:schemeClr val="phClr">
-                <a:tint val="100000"/>
-                <a:shade val="100000"/>
-                <a:satMod val="130000"/>
-              </a:schemeClr>
-            </a:gs>
-            <a:gs pos="100000">
-              <a:schemeClr val="phClr">
-                <a:tint val="50000"/>
-                <a:shade val="100000"/>
-                <a:satMod val="350000"/>
-              </a:schemeClr>
-            </a:gs>
-          </a:gsLst>
-          <a:lin ang="16200000" scaled="0"/>
-        </a:gradFill>
-      </a:fillStyleLst>
-      <a:lnStyleLst>
-        <a:ln w="9525" cap="flat" cmpd="sng" algn="ctr">
-          <a:solidFill>
-            <a:schemeClr val="phClr">
-              <a:shade val="95000"/>
-              <a:satMod val="105000"/>
-            </a:schemeClr>
-          </a:solidFill>
-          <a:prstDash val="solid"/>
-        </a:ln>
-        <a:ln w="25400" cap="flat" cmpd="sng" algn="ctr">
-          <a:solidFill>
-            <a:schemeClr val="phClr"/>
-          </a:solidFill>
-          <a:prstDash val="solid"/>
-        </a:ln>
-        <a:ln w="38100" cap="flat" cmpd="sng" algn="ctr">
-          <a:solidFill>
-            <a:schemeClr val="phClr"/>
-          </a:solidFill>
-          <a:prstDash val="solid"/>
-        </a:ln>
-      </a:lnStyleLst>
-      <a:effectStyleLst>
-        <a:effectStyle>
-          <a:effectLst>
-            <a:outerShdw blurRad="40000" dist="20000" dir="5400000" rotWithShape="0">
-              <a:srgbClr val="000000">
-                <a:alpha val="38000"/>
-              </a:srgbClr>
-            </a:outerShdw>
-          </a:effectLst>
-        </a:effectStyle>
-        <a:effectStyle>
-          <a:effectLst>
-            <a:outerShdw blurRad="40000" dist="23000" dir="5400000" rotWithShape="0">
-              <a:srgbClr val="000000">
-                <a:alpha val="35000"/>
-              </a:srgbClr>
-            </a:outerShdw>
-          </a:effectLst>
-        </a:effectStyle>
-        <a:effectStyle>
-          <a:effectLst>
-            <a:outerShdw blurRad="40000" dist="23000" dir="5400000" rotWithShape="0">
-              <a:srgbClr val="000000">
-                <a:alpha val="35000"/>
-              </a:srgbClr>
-            </a:outerShdw>
-          </a:effectLst>
-          <a:scene3d>
-            <a:camera prst="orthographicFront">
-              <a:rot lat="0" lon="0" rev="0"/>
-            </a:camera>
-            <a:lightRig rig="threePt" dir="t">
-              <a:rot lat="0" lon="0" rev="1200000"/>
-            </a:lightRig>
-          </a:scene3d>
-          <a:sp3d>
-            <a:bevelT w="63500" h="25400"/>
-          </a:sp3d>
-        </a:effectStyle>
-      </a:effectStyleLst>
-      <a:bgFillStyleLst>
-        <a:solidFill>
-          <a:schemeClr val="phClr"/>
-        </a:solidFill>
-        <a:gradFill rotWithShape="1">
-          <a:gsLst>
-            <a:gs pos="0">
-              <a:schemeClr val="phClr">
-                <a:tint val="40000"/>
-                <a:satMod val="350000"/>
-              </a:schemeClr>
-            </a:gs>
-            <a:gs pos="40000">
-              <a:schemeClr val="phClr">
-                <a:tint val="45000"/>
-                <a:shade val="99000"/>
-                <a:satMod val="350000"/>
-              </a:schemeClr>
-            </a:gs>
-            <a:gs pos="100000">
-              <a:schemeClr val="phClr">
-                <a:shade val="20000"/>
-                <a:satMod val="255000"/>
-              </a:schemeClr>
-            </a:gs>
-          </a:gsLst>
-          <a:path path="circle">
-            <a:fillToRect l="50000" t="-80000" r="50000" b="180000"/>
-          </a:path>
-        </a:gradFill>
-        <a:gradFill rotWithShape="1">
-          <a:gsLst>
-            <a:gs pos="0">
-              <a:schemeClr val="phClr">
-                <a:tint val="80000"/>
-                <a:satMod val="300000"/>
-              </a:schemeClr>
-            </a:gs>
-            <a:gs pos="100000">
-              <a:schemeClr val="phClr">
-                <a:shade val="30000"/>
-                <a:satMod val="200000"/>
-              </a:schemeClr>
-            </a:gs>
-          </a:gsLst>
-          <a:path path="circle">
-            <a:fillToRect l="50000" t="50000" r="50000" b="50000"/>
-          </a:path>
-        </a:gradFill>
-      </a:bgFillStyleLst>
-    </a:fmtScheme>
-  </a:themeElements>
-</a:theme>
 </file>